--- a/paidagogiko/ΠΡΥ 036-1 - Διδακτική Πληροφορικής Ι/Lesson 3/2.microdidaskalia.pptx
+++ b/paidagogiko/ΠΡΥ 036-1 - Διδακτική Πληροφορικής Ι/Lesson 3/2.microdidaskalia.pptx
@@ -5,23 +5,21 @@
     <p:sldMasterId id="2147483648" r:id="rId1"/>
   </p:sldMasterIdLst>
   <p:notesMasterIdLst>
-    <p:notesMasterId r:id="rId16"/>
+    <p:notesMasterId r:id="rId14"/>
   </p:notesMasterIdLst>
   <p:sldIdLst>
     <p:sldId id="277" r:id="rId2"/>
     <p:sldId id="276" r:id="rId3"/>
-    <p:sldId id="280" r:id="rId4"/>
-    <p:sldId id="288" r:id="rId5"/>
-    <p:sldId id="332" r:id="rId6"/>
-    <p:sldId id="313" r:id="rId7"/>
-    <p:sldId id="314" r:id="rId8"/>
-    <p:sldId id="317" r:id="rId9"/>
-    <p:sldId id="337" r:id="rId10"/>
-    <p:sldId id="338" r:id="rId11"/>
-    <p:sldId id="339" r:id="rId12"/>
-    <p:sldId id="340" r:id="rId13"/>
-    <p:sldId id="341" r:id="rId14"/>
-    <p:sldId id="342" r:id="rId15"/>
+    <p:sldId id="288" r:id="rId4"/>
+    <p:sldId id="332" r:id="rId5"/>
+    <p:sldId id="313" r:id="rId6"/>
+    <p:sldId id="314" r:id="rId7"/>
+    <p:sldId id="317" r:id="rId8"/>
+    <p:sldId id="337" r:id="rId9"/>
+    <p:sldId id="339" r:id="rId10"/>
+    <p:sldId id="340" r:id="rId11"/>
+    <p:sldId id="341" r:id="rId12"/>
+    <p:sldId id="342" r:id="rId13"/>
   </p:sldIdLst>
   <p:sldSz cx="9144000" cy="6858000" type="screen4x3"/>
   <p:notesSz cx="6858000" cy="9144000"/>
@@ -144,113 +142,22 @@
   <pc:docChgLst>
     <pc:chgData name="Άριστος Αρέστη" userId="813aa191-2d4c-464f-9d05-0a7e494d859f" providerId="ADAL" clId="{49C7B61D-1ACF-4AFF-A04E-A3B433E32474}"/>
     <pc:docChg chg="delSld">
-      <pc:chgData name="Άριστος Αρέστη" userId="813aa191-2d4c-464f-9d05-0a7e494d859f" providerId="ADAL" clId="{49C7B61D-1ACF-4AFF-A04E-A3B433E32474}" dt="2026-10-22T11:58:07.963" v="1" actId="47"/>
+      <pc:chgData name="Άριστος Αρέστη" userId="813aa191-2d4c-464f-9d05-0a7e494d859f" providerId="ADAL" clId="{49C7B61D-1ACF-4AFF-A04E-A3B433E32474}" dt="2026-10-28T19:26:19.443" v="3" actId="47"/>
       <pc:docMkLst>
         <pc:docMk/>
       </pc:docMkLst>
       <pc:sldChg chg="del">
-        <pc:chgData name="Άριστος Αρέστη" userId="813aa191-2d4c-464f-9d05-0a7e494d859f" providerId="ADAL" clId="{49C7B61D-1ACF-4AFF-A04E-A3B433E32474}" dt="2026-10-22T11:58:07.963" v="1" actId="47"/>
+        <pc:chgData name="Άριστος Αρέστη" userId="813aa191-2d4c-464f-9d05-0a7e494d859f" providerId="ADAL" clId="{49C7B61D-1ACF-4AFF-A04E-A3B433E32474}" dt="2026-10-28T19:24:27.133" v="2" actId="47"/>
         <pc:sldMkLst>
           <pc:docMk/>
-          <pc:sldMk cId="0" sldId="274"/>
+          <pc:sldMk cId="3542971618" sldId="280"/>
         </pc:sldMkLst>
       </pc:sldChg>
       <pc:sldChg chg="del">
-        <pc:chgData name="Άριστος Αρέστη" userId="813aa191-2d4c-464f-9d05-0a7e494d859f" providerId="ADAL" clId="{49C7B61D-1ACF-4AFF-A04E-A3B433E32474}" dt="2026-10-22T11:57:47.826" v="0" actId="2696"/>
+        <pc:chgData name="Άριστος Αρέστη" userId="813aa191-2d4c-464f-9d05-0a7e494d859f" providerId="ADAL" clId="{49C7B61D-1ACF-4AFF-A04E-A3B433E32474}" dt="2026-10-28T19:26:19.443" v="3" actId="47"/>
         <pc:sldMkLst>
           <pc:docMk/>
-          <pc:sldMk cId="2844892332" sldId="278"/>
-        </pc:sldMkLst>
-      </pc:sldChg>
-      <pc:sldChg chg="del">
-        <pc:chgData name="Άριστος Αρέστη" userId="813aa191-2d4c-464f-9d05-0a7e494d859f" providerId="ADAL" clId="{49C7B61D-1ACF-4AFF-A04E-A3B433E32474}" dt="2026-10-22T11:57:47.826" v="0" actId="2696"/>
-        <pc:sldMkLst>
-          <pc:docMk/>
-          <pc:sldMk cId="3737734990" sldId="287"/>
-        </pc:sldMkLst>
-      </pc:sldChg>
-      <pc:sldChg chg="del">
-        <pc:chgData name="Άριστος Αρέστη" userId="813aa191-2d4c-464f-9d05-0a7e494d859f" providerId="ADAL" clId="{49C7B61D-1ACF-4AFF-A04E-A3B433E32474}" dt="2026-10-22T11:58:07.963" v="1" actId="47"/>
-        <pc:sldMkLst>
-          <pc:docMk/>
-          <pc:sldMk cId="3446216825" sldId="292"/>
-        </pc:sldMkLst>
-      </pc:sldChg>
-      <pc:sldChg chg="del">
-        <pc:chgData name="Άριστος Αρέστη" userId="813aa191-2d4c-464f-9d05-0a7e494d859f" providerId="ADAL" clId="{49C7B61D-1ACF-4AFF-A04E-A3B433E32474}" dt="2026-10-22T11:57:47.826" v="0" actId="2696"/>
-        <pc:sldMkLst>
-          <pc:docMk/>
-          <pc:sldMk cId="74208894" sldId="299"/>
-        </pc:sldMkLst>
-      </pc:sldChg>
-      <pc:sldChg chg="del">
-        <pc:chgData name="Άριστος Αρέστη" userId="813aa191-2d4c-464f-9d05-0a7e494d859f" providerId="ADAL" clId="{49C7B61D-1ACF-4AFF-A04E-A3B433E32474}" dt="2026-10-22T11:57:47.826" v="0" actId="2696"/>
-        <pc:sldMkLst>
-          <pc:docMk/>
-          <pc:sldMk cId="87196975" sldId="300"/>
-        </pc:sldMkLst>
-      </pc:sldChg>
-      <pc:sldChg chg="del">
-        <pc:chgData name="Άριστος Αρέστη" userId="813aa191-2d4c-464f-9d05-0a7e494d859f" providerId="ADAL" clId="{49C7B61D-1ACF-4AFF-A04E-A3B433E32474}" dt="2026-10-22T11:57:47.826" v="0" actId="2696"/>
-        <pc:sldMkLst>
-          <pc:docMk/>
-          <pc:sldMk cId="3238520119" sldId="328"/>
-        </pc:sldMkLst>
-      </pc:sldChg>
-      <pc:sldChg chg="del">
-        <pc:chgData name="Άριστος Αρέστη" userId="813aa191-2d4c-464f-9d05-0a7e494d859f" providerId="ADAL" clId="{49C7B61D-1ACF-4AFF-A04E-A3B433E32474}" dt="2026-10-22T11:57:47.826" v="0" actId="2696"/>
-        <pc:sldMkLst>
-          <pc:docMk/>
-          <pc:sldMk cId="3355939526" sldId="329"/>
-        </pc:sldMkLst>
-      </pc:sldChg>
-      <pc:sldChg chg="del">
-        <pc:chgData name="Άριστος Αρέστη" userId="813aa191-2d4c-464f-9d05-0a7e494d859f" providerId="ADAL" clId="{49C7B61D-1ACF-4AFF-A04E-A3B433E32474}" dt="2026-10-22T11:57:47.826" v="0" actId="2696"/>
-        <pc:sldMkLst>
-          <pc:docMk/>
-          <pc:sldMk cId="3435828759" sldId="331"/>
-        </pc:sldMkLst>
-      </pc:sldChg>
-      <pc:sldChg chg="del">
-        <pc:chgData name="Άριστος Αρέστη" userId="813aa191-2d4c-464f-9d05-0a7e494d859f" providerId="ADAL" clId="{49C7B61D-1ACF-4AFF-A04E-A3B433E32474}" dt="2026-10-22T11:58:07.963" v="1" actId="47"/>
-        <pc:sldMkLst>
-          <pc:docMk/>
-          <pc:sldMk cId="1083717274" sldId="343"/>
-        </pc:sldMkLst>
-      </pc:sldChg>
-      <pc:sldChg chg="del">
-        <pc:chgData name="Άριστος Αρέστη" userId="813aa191-2d4c-464f-9d05-0a7e494d859f" providerId="ADAL" clId="{49C7B61D-1ACF-4AFF-A04E-A3B433E32474}" dt="2026-10-22T11:58:07.963" v="1" actId="47"/>
-        <pc:sldMkLst>
-          <pc:docMk/>
-          <pc:sldMk cId="3714450618" sldId="345"/>
-        </pc:sldMkLst>
-      </pc:sldChg>
-      <pc:sldChg chg="del">
-        <pc:chgData name="Άριστος Αρέστη" userId="813aa191-2d4c-464f-9d05-0a7e494d859f" providerId="ADAL" clId="{49C7B61D-1ACF-4AFF-A04E-A3B433E32474}" dt="2026-10-22T11:58:07.963" v="1" actId="47"/>
-        <pc:sldMkLst>
-          <pc:docMk/>
-          <pc:sldMk cId="74871046" sldId="346"/>
-        </pc:sldMkLst>
-      </pc:sldChg>
-      <pc:sldChg chg="del">
-        <pc:chgData name="Άριστος Αρέστη" userId="813aa191-2d4c-464f-9d05-0a7e494d859f" providerId="ADAL" clId="{49C7B61D-1ACF-4AFF-A04E-A3B433E32474}" dt="2026-10-22T11:58:07.963" v="1" actId="47"/>
-        <pc:sldMkLst>
-          <pc:docMk/>
-          <pc:sldMk cId="2816334843" sldId="347"/>
-        </pc:sldMkLst>
-      </pc:sldChg>
-      <pc:sldChg chg="del">
-        <pc:chgData name="Άριστος Αρέστη" userId="813aa191-2d4c-464f-9d05-0a7e494d859f" providerId="ADAL" clId="{49C7B61D-1ACF-4AFF-A04E-A3B433E32474}" dt="2026-10-22T11:58:07.963" v="1" actId="47"/>
-        <pc:sldMkLst>
-          <pc:docMk/>
-          <pc:sldMk cId="2150347099" sldId="348"/>
-        </pc:sldMkLst>
-      </pc:sldChg>
-      <pc:sldChg chg="del">
-        <pc:chgData name="Άριστος Αρέστη" userId="813aa191-2d4c-464f-9d05-0a7e494d859f" providerId="ADAL" clId="{49C7B61D-1ACF-4AFF-A04E-A3B433E32474}" dt="2026-10-22T11:58:07.963" v="1" actId="47"/>
-        <pc:sldMkLst>
-          <pc:docMk/>
-          <pc:sldMk cId="3881687124" sldId="349"/>
+          <pc:sldMk cId="3361842378" sldId="338"/>
         </pc:sldMkLst>
       </pc:sldChg>
     </pc:docChg>
@@ -3271,7 +3178,7 @@
           <a:p>
             <a:fld id="{74567DA2-3ABD-4083-9D89-D1C9CC448C3D}" type="datetimeFigureOut">
               <a:rPr lang="en-GB" smtClean="0"/>
-              <a:t>22/10/2026</a:t>
+              <a:t>28/10/2026</a:t>
             </a:fld>
             <a:endParaRPr lang="en-GB"/>
           </a:p>
@@ -3610,7 +3517,7 @@
             <a:fld id="{1A63F591-F0B7-4228-BB71-5A60929AFF28}" type="slidenum">
               <a:rPr lang="el-GR" smtClean="0"/>
               <a:pPr/>
-              <a:t>5</a:t>
+              <a:t>4</a:t>
             </a:fld>
             <a:endParaRPr lang="el-GR"/>
           </a:p>
@@ -3620,120 +3527,6 @@
     <p:extLst>
       <p:ext uri="{BB962C8B-B14F-4D97-AF65-F5344CB8AC3E}">
         <p14:creationId xmlns:p14="http://schemas.microsoft.com/office/powerpoint/2010/main" val="2897800130"/>
-      </p:ext>
-    </p:extLst>
-  </p:cSld>
-  <p:clrMapOvr>
-    <a:masterClrMapping/>
-  </p:clrMapOvr>
-</p:notes>
-</file>
-
-<file path=ppt/notesSlides/notesSlide10.xml><?xml version="1.0" encoding="utf-8"?>
-<p:notes xmlns:a="http://schemas.openxmlformats.org/drawingml/2006/main" xmlns:r="http://schemas.openxmlformats.org/officeDocument/2006/relationships" xmlns:p="http://schemas.openxmlformats.org/presentationml/2006/main">
-  <p:cSld>
-    <p:spTree>
-      <p:nvGrpSpPr>
-        <p:cNvPr id="1" name="">
-          <a:extLst>
-            <a:ext uri="{FF2B5EF4-FFF2-40B4-BE49-F238E27FC236}">
-              <a16:creationId xmlns:a16="http://schemas.microsoft.com/office/drawing/2014/main" id="{DDB2DF36-E6BD-27DA-97F3-7AEC097CD1B3}"/>
-            </a:ext>
-          </a:extLst>
-        </p:cNvPr>
-        <p:cNvGrpSpPr/>
-        <p:nvPr/>
-      </p:nvGrpSpPr>
-      <p:grpSpPr>
-        <a:xfrm>
-          <a:off x="0" y="0"/>
-          <a:ext cx="0" cy="0"/>
-          <a:chOff x="0" y="0"/>
-          <a:chExt cx="0" cy="0"/>
-        </a:xfrm>
-      </p:grpSpPr>
-      <p:sp>
-        <p:nvSpPr>
-          <p:cNvPr id="2" name="Slide Image Placeholder 1">
-            <a:extLst>
-              <a:ext uri="{FF2B5EF4-FFF2-40B4-BE49-F238E27FC236}">
-                <a16:creationId xmlns:a16="http://schemas.microsoft.com/office/drawing/2014/main" id="{15BC1E42-B10D-AE9F-CEBF-531D09CB2CA5}"/>
-              </a:ext>
-            </a:extLst>
-          </p:cNvPr>
-          <p:cNvSpPr>
-            <a:spLocks noGrp="1" noRot="1" noChangeAspect="1"/>
-          </p:cNvSpPr>
-          <p:nvPr>
-            <p:ph type="sldImg"/>
-          </p:nvPr>
-        </p:nvSpPr>
-        <p:spPr>
-          <a:xfrm>
-            <a:off x="917575" y="744538"/>
-            <a:ext cx="4962525" cy="3722687"/>
-          </a:xfrm>
-        </p:spPr>
-      </p:sp>
-      <p:sp>
-        <p:nvSpPr>
-          <p:cNvPr id="3" name="Notes Placeholder 2">
-            <a:extLst>
-              <a:ext uri="{FF2B5EF4-FFF2-40B4-BE49-F238E27FC236}">
-                <a16:creationId xmlns:a16="http://schemas.microsoft.com/office/drawing/2014/main" id="{F0A2CDBF-3C59-ACFE-CCB9-019121FFBAB5}"/>
-              </a:ext>
-            </a:extLst>
-          </p:cNvPr>
-          <p:cNvSpPr>
-            <a:spLocks noGrp="1"/>
-          </p:cNvSpPr>
-          <p:nvPr>
-            <p:ph type="body" idx="1"/>
-          </p:nvPr>
-        </p:nvSpPr>
-        <p:spPr/>
-        <p:txBody>
-          <a:bodyPr/>
-          <a:lstStyle/>
-          <a:p>
-            <a:endParaRPr lang="el-GR"/>
-          </a:p>
-        </p:txBody>
-      </p:sp>
-      <p:sp>
-        <p:nvSpPr>
-          <p:cNvPr id="4" name="Slide Number Placeholder 3">
-            <a:extLst>
-              <a:ext uri="{FF2B5EF4-FFF2-40B4-BE49-F238E27FC236}">
-                <a16:creationId xmlns:a16="http://schemas.microsoft.com/office/drawing/2014/main" id="{C4009B8F-B570-8CFB-916B-621679EA0622}"/>
-              </a:ext>
-            </a:extLst>
-          </p:cNvPr>
-          <p:cNvSpPr>
-            <a:spLocks noGrp="1"/>
-          </p:cNvSpPr>
-          <p:nvPr>
-            <p:ph type="sldNum" sz="quarter" idx="10"/>
-          </p:nvPr>
-        </p:nvSpPr>
-        <p:spPr/>
-        <p:txBody>
-          <a:bodyPr/>
-          <a:lstStyle/>
-          <a:p>
-            <a:fld id="{1A63F591-F0B7-4228-BB71-5A60929AFF28}" type="slidenum">
-              <a:rPr lang="el-GR" smtClean="0"/>
-              <a:pPr/>
-              <a:t>14</a:t>
-            </a:fld>
-            <a:endParaRPr lang="el-GR"/>
-          </a:p>
-        </p:txBody>
-      </p:sp>
-    </p:spTree>
-    <p:extLst>
-      <p:ext uri="{BB962C8B-B14F-4D97-AF65-F5344CB8AC3E}">
-        <p14:creationId xmlns:p14="http://schemas.microsoft.com/office/powerpoint/2010/main" val="180050829"/>
       </p:ext>
     </p:extLst>
   </p:cSld>
@@ -3814,7 +3607,7 @@
             <a:fld id="{1A63F591-F0B7-4228-BB71-5A60929AFF28}" type="slidenum">
               <a:rPr lang="el-GR" smtClean="0"/>
               <a:pPr/>
-              <a:t>6</a:t>
+              <a:t>5</a:t>
             </a:fld>
             <a:endParaRPr lang="el-GR"/>
           </a:p>
@@ -3904,7 +3697,7 @@
             <a:fld id="{1A63F591-F0B7-4228-BB71-5A60929AFF28}" type="slidenum">
               <a:rPr lang="el-GR" smtClean="0"/>
               <a:pPr/>
-              <a:t>7</a:t>
+              <a:t>6</a:t>
             </a:fld>
             <a:endParaRPr lang="el-GR"/>
           </a:p>
@@ -3994,7 +3787,7 @@
             <a:fld id="{1A63F591-F0B7-4228-BB71-5A60929AFF28}" type="slidenum">
               <a:rPr lang="el-GR" smtClean="0"/>
               <a:pPr/>
-              <a:t>8</a:t>
+              <a:t>7</a:t>
             </a:fld>
             <a:endParaRPr lang="el-GR"/>
           </a:p>
@@ -4108,7 +3901,7 @@
             <a:fld id="{1A63F591-F0B7-4228-BB71-5A60929AFF28}" type="slidenum">
               <a:rPr lang="el-GR" smtClean="0"/>
               <a:pPr/>
-              <a:t>9</a:t>
+              <a:t>8</a:t>
             </a:fld>
             <a:endParaRPr lang="el-GR"/>
           </a:p>
@@ -4128,120 +3921,6 @@
 </file>
 
 <file path=ppt/notesSlides/notesSlide6.xml><?xml version="1.0" encoding="utf-8"?>
-<p:notes xmlns:a="http://schemas.openxmlformats.org/drawingml/2006/main" xmlns:r="http://schemas.openxmlformats.org/officeDocument/2006/relationships" xmlns:p="http://schemas.openxmlformats.org/presentationml/2006/main">
-  <p:cSld>
-    <p:spTree>
-      <p:nvGrpSpPr>
-        <p:cNvPr id="1" name="">
-          <a:extLst>
-            <a:ext uri="{FF2B5EF4-FFF2-40B4-BE49-F238E27FC236}">
-              <a16:creationId xmlns:a16="http://schemas.microsoft.com/office/drawing/2014/main" id="{198A6705-4D73-D5C4-C29B-FC50B089CB6F}"/>
-            </a:ext>
-          </a:extLst>
-        </p:cNvPr>
-        <p:cNvGrpSpPr/>
-        <p:nvPr/>
-      </p:nvGrpSpPr>
-      <p:grpSpPr>
-        <a:xfrm>
-          <a:off x="0" y="0"/>
-          <a:ext cx="0" cy="0"/>
-          <a:chOff x="0" y="0"/>
-          <a:chExt cx="0" cy="0"/>
-        </a:xfrm>
-      </p:grpSpPr>
-      <p:sp>
-        <p:nvSpPr>
-          <p:cNvPr id="2" name="Slide Image Placeholder 1">
-            <a:extLst>
-              <a:ext uri="{FF2B5EF4-FFF2-40B4-BE49-F238E27FC236}">
-                <a16:creationId xmlns:a16="http://schemas.microsoft.com/office/drawing/2014/main" id="{2AA38CF3-BC43-6111-24FD-0BA50397CCD9}"/>
-              </a:ext>
-            </a:extLst>
-          </p:cNvPr>
-          <p:cNvSpPr>
-            <a:spLocks noGrp="1" noRot="1" noChangeAspect="1"/>
-          </p:cNvSpPr>
-          <p:nvPr>
-            <p:ph type="sldImg"/>
-          </p:nvPr>
-        </p:nvSpPr>
-        <p:spPr>
-          <a:xfrm>
-            <a:off x="917575" y="744538"/>
-            <a:ext cx="4962525" cy="3722687"/>
-          </a:xfrm>
-        </p:spPr>
-      </p:sp>
-      <p:sp>
-        <p:nvSpPr>
-          <p:cNvPr id="3" name="Notes Placeholder 2">
-            <a:extLst>
-              <a:ext uri="{FF2B5EF4-FFF2-40B4-BE49-F238E27FC236}">
-                <a16:creationId xmlns:a16="http://schemas.microsoft.com/office/drawing/2014/main" id="{C4EBBA7E-DE88-AAA1-08C4-1243A493D3E3}"/>
-              </a:ext>
-            </a:extLst>
-          </p:cNvPr>
-          <p:cNvSpPr>
-            <a:spLocks noGrp="1"/>
-          </p:cNvSpPr>
-          <p:nvPr>
-            <p:ph type="body" idx="1"/>
-          </p:nvPr>
-        </p:nvSpPr>
-        <p:spPr/>
-        <p:txBody>
-          <a:bodyPr/>
-          <a:lstStyle/>
-          <a:p>
-            <a:endParaRPr lang="el-GR"/>
-          </a:p>
-        </p:txBody>
-      </p:sp>
-      <p:sp>
-        <p:nvSpPr>
-          <p:cNvPr id="4" name="Slide Number Placeholder 3">
-            <a:extLst>
-              <a:ext uri="{FF2B5EF4-FFF2-40B4-BE49-F238E27FC236}">
-                <a16:creationId xmlns:a16="http://schemas.microsoft.com/office/drawing/2014/main" id="{191E3B29-A7D2-7F8E-483A-361AFAA98B82}"/>
-              </a:ext>
-            </a:extLst>
-          </p:cNvPr>
-          <p:cNvSpPr>
-            <a:spLocks noGrp="1"/>
-          </p:cNvSpPr>
-          <p:nvPr>
-            <p:ph type="sldNum" sz="quarter" idx="10"/>
-          </p:nvPr>
-        </p:nvSpPr>
-        <p:spPr/>
-        <p:txBody>
-          <a:bodyPr/>
-          <a:lstStyle/>
-          <a:p>
-            <a:fld id="{1A63F591-F0B7-4228-BB71-5A60929AFF28}" type="slidenum">
-              <a:rPr lang="el-GR" smtClean="0"/>
-              <a:pPr/>
-              <a:t>10</a:t>
-            </a:fld>
-            <a:endParaRPr lang="el-GR"/>
-          </a:p>
-        </p:txBody>
-      </p:sp>
-    </p:spTree>
-    <p:extLst>
-      <p:ext uri="{BB962C8B-B14F-4D97-AF65-F5344CB8AC3E}">
-        <p14:creationId xmlns:p14="http://schemas.microsoft.com/office/powerpoint/2010/main" val="1151624522"/>
-      </p:ext>
-    </p:extLst>
-  </p:cSld>
-  <p:clrMapOvr>
-    <a:masterClrMapping/>
-  </p:clrMapOvr>
-</p:notes>
-</file>
-
-<file path=ppt/notesSlides/notesSlide7.xml><?xml version="1.0" encoding="utf-8"?>
 <p:notes xmlns:a="http://schemas.openxmlformats.org/drawingml/2006/main" xmlns:r="http://schemas.openxmlformats.org/officeDocument/2006/relationships" xmlns:p="http://schemas.openxmlformats.org/presentationml/2006/main">
   <p:cSld>
     <p:spTree>
@@ -4336,7 +4015,7 @@
             <a:fld id="{1A63F591-F0B7-4228-BB71-5A60929AFF28}" type="slidenum">
               <a:rPr lang="el-GR" smtClean="0"/>
               <a:pPr/>
-              <a:t>11</a:t>
+              <a:t>9</a:t>
             </a:fld>
             <a:endParaRPr lang="el-GR"/>
           </a:p>
@@ -4355,7 +4034,7 @@
 </p:notes>
 </file>
 
-<file path=ppt/notesSlides/notesSlide8.xml><?xml version="1.0" encoding="utf-8"?>
+<file path=ppt/notesSlides/notesSlide7.xml><?xml version="1.0" encoding="utf-8"?>
 <p:notes xmlns:a="http://schemas.openxmlformats.org/drawingml/2006/main" xmlns:r="http://schemas.openxmlformats.org/officeDocument/2006/relationships" xmlns:p="http://schemas.openxmlformats.org/presentationml/2006/main">
   <p:cSld>
     <p:spTree>
@@ -4450,7 +4129,7 @@
             <a:fld id="{1A63F591-F0B7-4228-BB71-5A60929AFF28}" type="slidenum">
               <a:rPr lang="el-GR" smtClean="0"/>
               <a:pPr/>
-              <a:t>12</a:t>
+              <a:t>10</a:t>
             </a:fld>
             <a:endParaRPr lang="el-GR"/>
           </a:p>
@@ -4469,7 +4148,7 @@
 </p:notes>
 </file>
 
-<file path=ppt/notesSlides/notesSlide9.xml><?xml version="1.0" encoding="utf-8"?>
+<file path=ppt/notesSlides/notesSlide8.xml><?xml version="1.0" encoding="utf-8"?>
 <p:notes xmlns:a="http://schemas.openxmlformats.org/drawingml/2006/main" xmlns:r="http://schemas.openxmlformats.org/officeDocument/2006/relationships" xmlns:p="http://schemas.openxmlformats.org/presentationml/2006/main">
   <p:cSld>
     <p:spTree>
@@ -4564,7 +4243,7 @@
             <a:fld id="{1A63F591-F0B7-4228-BB71-5A60929AFF28}" type="slidenum">
               <a:rPr lang="el-GR" smtClean="0"/>
               <a:pPr/>
-              <a:t>13</a:t>
+              <a:t>11</a:t>
             </a:fld>
             <a:endParaRPr lang="el-GR"/>
           </a:p>
@@ -4574,6 +4253,120 @@
     <p:extLst>
       <p:ext uri="{BB962C8B-B14F-4D97-AF65-F5344CB8AC3E}">
         <p14:creationId xmlns:p14="http://schemas.microsoft.com/office/powerpoint/2010/main" val="898648627"/>
+      </p:ext>
+    </p:extLst>
+  </p:cSld>
+  <p:clrMapOvr>
+    <a:masterClrMapping/>
+  </p:clrMapOvr>
+</p:notes>
+</file>
+
+<file path=ppt/notesSlides/notesSlide9.xml><?xml version="1.0" encoding="utf-8"?>
+<p:notes xmlns:a="http://schemas.openxmlformats.org/drawingml/2006/main" xmlns:r="http://schemas.openxmlformats.org/officeDocument/2006/relationships" xmlns:p="http://schemas.openxmlformats.org/presentationml/2006/main">
+  <p:cSld>
+    <p:spTree>
+      <p:nvGrpSpPr>
+        <p:cNvPr id="1" name="">
+          <a:extLst>
+            <a:ext uri="{FF2B5EF4-FFF2-40B4-BE49-F238E27FC236}">
+              <a16:creationId xmlns:a16="http://schemas.microsoft.com/office/drawing/2014/main" id="{DDB2DF36-E6BD-27DA-97F3-7AEC097CD1B3}"/>
+            </a:ext>
+          </a:extLst>
+        </p:cNvPr>
+        <p:cNvGrpSpPr/>
+        <p:nvPr/>
+      </p:nvGrpSpPr>
+      <p:grpSpPr>
+        <a:xfrm>
+          <a:off x="0" y="0"/>
+          <a:ext cx="0" cy="0"/>
+          <a:chOff x="0" y="0"/>
+          <a:chExt cx="0" cy="0"/>
+        </a:xfrm>
+      </p:grpSpPr>
+      <p:sp>
+        <p:nvSpPr>
+          <p:cNvPr id="2" name="Slide Image Placeholder 1">
+            <a:extLst>
+              <a:ext uri="{FF2B5EF4-FFF2-40B4-BE49-F238E27FC236}">
+                <a16:creationId xmlns:a16="http://schemas.microsoft.com/office/drawing/2014/main" id="{15BC1E42-B10D-AE9F-CEBF-531D09CB2CA5}"/>
+              </a:ext>
+            </a:extLst>
+          </p:cNvPr>
+          <p:cNvSpPr>
+            <a:spLocks noGrp="1" noRot="1" noChangeAspect="1"/>
+          </p:cNvSpPr>
+          <p:nvPr>
+            <p:ph type="sldImg"/>
+          </p:nvPr>
+        </p:nvSpPr>
+        <p:spPr>
+          <a:xfrm>
+            <a:off x="917575" y="744538"/>
+            <a:ext cx="4962525" cy="3722687"/>
+          </a:xfrm>
+        </p:spPr>
+      </p:sp>
+      <p:sp>
+        <p:nvSpPr>
+          <p:cNvPr id="3" name="Notes Placeholder 2">
+            <a:extLst>
+              <a:ext uri="{FF2B5EF4-FFF2-40B4-BE49-F238E27FC236}">
+                <a16:creationId xmlns:a16="http://schemas.microsoft.com/office/drawing/2014/main" id="{F0A2CDBF-3C59-ACFE-CCB9-019121FFBAB5}"/>
+              </a:ext>
+            </a:extLst>
+          </p:cNvPr>
+          <p:cNvSpPr>
+            <a:spLocks noGrp="1"/>
+          </p:cNvSpPr>
+          <p:nvPr>
+            <p:ph type="body" idx="1"/>
+          </p:nvPr>
+        </p:nvSpPr>
+        <p:spPr/>
+        <p:txBody>
+          <a:bodyPr/>
+          <a:lstStyle/>
+          <a:p>
+            <a:endParaRPr lang="el-GR"/>
+          </a:p>
+        </p:txBody>
+      </p:sp>
+      <p:sp>
+        <p:nvSpPr>
+          <p:cNvPr id="4" name="Slide Number Placeholder 3">
+            <a:extLst>
+              <a:ext uri="{FF2B5EF4-FFF2-40B4-BE49-F238E27FC236}">
+                <a16:creationId xmlns:a16="http://schemas.microsoft.com/office/drawing/2014/main" id="{C4009B8F-B570-8CFB-916B-621679EA0622}"/>
+              </a:ext>
+            </a:extLst>
+          </p:cNvPr>
+          <p:cNvSpPr>
+            <a:spLocks noGrp="1"/>
+          </p:cNvSpPr>
+          <p:nvPr>
+            <p:ph type="sldNum" sz="quarter" idx="10"/>
+          </p:nvPr>
+        </p:nvSpPr>
+        <p:spPr/>
+        <p:txBody>
+          <a:bodyPr/>
+          <a:lstStyle/>
+          <a:p>
+            <a:fld id="{1A63F591-F0B7-4228-BB71-5A60929AFF28}" type="slidenum">
+              <a:rPr lang="el-GR" smtClean="0"/>
+              <a:pPr/>
+              <a:t>12</a:t>
+            </a:fld>
+            <a:endParaRPr lang="el-GR"/>
+          </a:p>
+        </p:txBody>
+      </p:sp>
+    </p:spTree>
+    <p:extLst>
+      <p:ext uri="{BB962C8B-B14F-4D97-AF65-F5344CB8AC3E}">
+        <p14:creationId xmlns:p14="http://schemas.microsoft.com/office/powerpoint/2010/main" val="180050829"/>
       </p:ext>
     </p:extLst>
   </p:cSld>
@@ -4763,7 +4556,7 @@
             <a:fld id="{A880B2B7-3155-4641-A8F2-C1656F8110F8}" type="datetimeFigureOut">
               <a:rPr lang="en-US" smtClean="0"/>
               <a:pPr/>
-              <a:t>22-Oct-26</a:t>
+              <a:t>28-Oct-26</a:t>
             </a:fld>
             <a:endParaRPr lang="en-US"/>
           </a:p>
@@ -4928,7 +4721,7 @@
             <a:fld id="{A880B2B7-3155-4641-A8F2-C1656F8110F8}" type="datetimeFigureOut">
               <a:rPr lang="en-US" smtClean="0"/>
               <a:pPr/>
-              <a:t>22-Oct-26</a:t>
+              <a:t>28-Oct-26</a:t>
             </a:fld>
             <a:endParaRPr lang="en-US"/>
           </a:p>
@@ -5103,7 +4896,7 @@
             <a:fld id="{A880B2B7-3155-4641-A8F2-C1656F8110F8}" type="datetimeFigureOut">
               <a:rPr lang="en-US" smtClean="0"/>
               <a:pPr/>
-              <a:t>22-Oct-26</a:t>
+              <a:t>28-Oct-26</a:t>
             </a:fld>
             <a:endParaRPr lang="en-US"/>
           </a:p>
@@ -5268,7 +5061,7 @@
             <a:fld id="{A880B2B7-3155-4641-A8F2-C1656F8110F8}" type="datetimeFigureOut">
               <a:rPr lang="en-US" smtClean="0"/>
               <a:pPr/>
-              <a:t>22-Oct-26</a:t>
+              <a:t>28-Oct-26</a:t>
             </a:fld>
             <a:endParaRPr lang="en-US"/>
           </a:p>
@@ -5510,7 +5303,7 @@
             <a:fld id="{A880B2B7-3155-4641-A8F2-C1656F8110F8}" type="datetimeFigureOut">
               <a:rPr lang="en-US" smtClean="0"/>
               <a:pPr/>
-              <a:t>22-Oct-26</a:t>
+              <a:t>28-Oct-26</a:t>
             </a:fld>
             <a:endParaRPr lang="en-US"/>
           </a:p>
@@ -5792,7 +5585,7 @@
             <a:fld id="{A880B2B7-3155-4641-A8F2-C1656F8110F8}" type="datetimeFigureOut">
               <a:rPr lang="en-US" smtClean="0"/>
               <a:pPr/>
-              <a:t>22-Oct-26</a:t>
+              <a:t>28-Oct-26</a:t>
             </a:fld>
             <a:endParaRPr lang="en-US"/>
           </a:p>
@@ -6208,7 +6001,7 @@
             <a:fld id="{A880B2B7-3155-4641-A8F2-C1656F8110F8}" type="datetimeFigureOut">
               <a:rPr lang="en-US" smtClean="0"/>
               <a:pPr/>
-              <a:t>22-Oct-26</a:t>
+              <a:t>28-Oct-26</a:t>
             </a:fld>
             <a:endParaRPr lang="en-US"/>
           </a:p>
@@ -6322,7 +6115,7 @@
             <a:fld id="{A880B2B7-3155-4641-A8F2-C1656F8110F8}" type="datetimeFigureOut">
               <a:rPr lang="en-US" smtClean="0"/>
               <a:pPr/>
-              <a:t>22-Oct-26</a:t>
+              <a:t>28-Oct-26</a:t>
             </a:fld>
             <a:endParaRPr lang="en-US"/>
           </a:p>
@@ -6414,7 +6207,7 @@
             <a:fld id="{A880B2B7-3155-4641-A8F2-C1656F8110F8}" type="datetimeFigureOut">
               <a:rPr lang="en-US" smtClean="0"/>
               <a:pPr/>
-              <a:t>22-Oct-26</a:t>
+              <a:t>28-Oct-26</a:t>
             </a:fld>
             <a:endParaRPr lang="en-US"/>
           </a:p>
@@ -6686,7 +6479,7 @@
             <a:fld id="{A880B2B7-3155-4641-A8F2-C1656F8110F8}" type="datetimeFigureOut">
               <a:rPr lang="en-US" smtClean="0"/>
               <a:pPr/>
-              <a:t>22-Oct-26</a:t>
+              <a:t>28-Oct-26</a:t>
             </a:fld>
             <a:endParaRPr lang="en-US"/>
           </a:p>
@@ -6935,7 +6728,7 @@
             <a:fld id="{A880B2B7-3155-4641-A8F2-C1656F8110F8}" type="datetimeFigureOut">
               <a:rPr lang="en-US" smtClean="0"/>
               <a:pPr/>
-              <a:t>22-Oct-26</a:t>
+              <a:t>28-Oct-26</a:t>
             </a:fld>
             <a:endParaRPr lang="en-US"/>
           </a:p>
@@ -7143,7 +6936,7 @@
             <a:fld id="{A880B2B7-3155-4641-A8F2-C1656F8110F8}" type="datetimeFigureOut">
               <a:rPr lang="en-US" smtClean="0"/>
               <a:pPr/>
-              <a:t>22-Oct-26</a:t>
+              <a:t>28-Oct-26</a:t>
             </a:fld>
             <a:endParaRPr lang="en-US"/>
           </a:p>
@@ -8661,443 +8454,6 @@
         <p:cNvPr id="1" name="">
           <a:extLst>
             <a:ext uri="{FF2B5EF4-FFF2-40B4-BE49-F238E27FC236}">
-              <a16:creationId xmlns:a16="http://schemas.microsoft.com/office/drawing/2014/main" id="{2FD9FBFE-3690-F059-DD21-D3FFDFFFB697}"/>
-            </a:ext>
-          </a:extLst>
-        </p:cNvPr>
-        <p:cNvGrpSpPr/>
-        <p:nvPr/>
-      </p:nvGrpSpPr>
-      <p:grpSpPr>
-        <a:xfrm>
-          <a:off x="0" y="0"/>
-          <a:ext cx="0" cy="0"/>
-          <a:chOff x="0" y="0"/>
-          <a:chExt cx="0" cy="0"/>
-        </a:xfrm>
-      </p:grpSpPr>
-      <p:sp>
-        <p:nvSpPr>
-          <p:cNvPr id="4" name="Title 1">
-            <a:extLst>
-              <a:ext uri="{FF2B5EF4-FFF2-40B4-BE49-F238E27FC236}">
-                <a16:creationId xmlns:a16="http://schemas.microsoft.com/office/drawing/2014/main" id="{9507E905-2035-7D35-7C40-D1CBBD8A5D30}"/>
-              </a:ext>
-            </a:extLst>
-          </p:cNvPr>
-          <p:cNvSpPr>
-            <a:spLocks noGrp="1"/>
-          </p:cNvSpPr>
-          <p:nvPr>
-            <p:ph type="title"/>
-          </p:nvPr>
-        </p:nvSpPr>
-        <p:spPr>
-          <a:solidFill>
-            <a:srgbClr val="FAC090"/>
-          </a:solidFill>
-        </p:spPr>
-        <p:txBody>
-          <a:bodyPr>
-            <a:noAutofit/>
-          </a:bodyPr>
-          <a:lstStyle/>
-          <a:p>
-            <a:r>
-              <a:rPr lang="el-GR" sz="3600" dirty="0"/>
-              <a:t>Εργασία</a:t>
-            </a:r>
-            <a:endParaRPr lang="el-GR" sz="3600" b="1" dirty="0"/>
-          </a:p>
-        </p:txBody>
-      </p:sp>
-      <p:pic>
-        <p:nvPicPr>
-          <p:cNvPr id="5" name="Picture 2" descr="http://ucy.ac.cy/proypiresiaki/images/template_img/logo_el.png">
-            <a:extLst>
-              <a:ext uri="{FF2B5EF4-FFF2-40B4-BE49-F238E27FC236}">
-                <a16:creationId xmlns:a16="http://schemas.microsoft.com/office/drawing/2014/main" id="{9069813C-F685-3C80-0844-53BA86807DEB}"/>
-              </a:ext>
-            </a:extLst>
-          </p:cNvPr>
-          <p:cNvPicPr>
-            <a:picLocks noChangeAspect="1" noChangeArrowheads="1"/>
-          </p:cNvPicPr>
-          <p:nvPr/>
-        </p:nvPicPr>
-        <p:blipFill>
-          <a:blip r:embed="rId4"/>
-          <a:srcRect/>
-          <a:stretch>
-            <a:fillRect/>
-          </a:stretch>
-        </p:blipFill>
-        <p:spPr bwMode="auto">
-          <a:xfrm>
-            <a:off x="7086600" y="6172200"/>
-            <a:ext cx="1920240" cy="533400"/>
-          </a:xfrm>
-          <a:prstGeom prst="rect">
-            <a:avLst/>
-          </a:prstGeom>
-          <a:noFill/>
-        </p:spPr>
-      </p:pic>
-      <p:sp>
-        <p:nvSpPr>
-          <p:cNvPr id="7" name="Content Placeholder 6">
-            <a:extLst>
-              <a:ext uri="{FF2B5EF4-FFF2-40B4-BE49-F238E27FC236}">
-                <a16:creationId xmlns:a16="http://schemas.microsoft.com/office/drawing/2014/main" id="{64A78814-A72C-FBEE-97D5-B5949A4E68C9}"/>
-              </a:ext>
-            </a:extLst>
-          </p:cNvPr>
-          <p:cNvSpPr>
-            <a:spLocks noGrp="1"/>
-          </p:cNvSpPr>
-          <p:nvPr>
-            <p:ph idx="1"/>
-          </p:nvPr>
-        </p:nvSpPr>
-        <p:spPr>
-          <a:xfrm>
-            <a:off x="457200" y="1600200"/>
-            <a:ext cx="8229600" cy="4267200"/>
-          </a:xfrm>
-        </p:spPr>
-        <p:txBody>
-          <a:bodyPr>
-            <a:noAutofit/>
-          </a:bodyPr>
-          <a:lstStyle/>
-          <a:p>
-            <a:pPr marL="550863" indent="-285750">
-              <a:spcBef>
-                <a:spcPts val="400"/>
-              </a:spcBef>
-            </a:pPr>
-            <a:r>
-              <a:rPr lang="el-GR" sz="2400" dirty="0"/>
-              <a:t>Κάθε ομάδα θα έχει στη διάθεση της 18 λεπτά.</a:t>
-            </a:r>
-          </a:p>
-          <a:p>
-            <a:pPr marL="550863" indent="-285750">
-              <a:spcBef>
-                <a:spcPts val="400"/>
-              </a:spcBef>
-            </a:pPr>
-            <a:r>
-              <a:rPr lang="el-GR" sz="2400" dirty="0"/>
-              <a:t>Θα μπορεί να επιλέξει τους δείκτες επιτυχίας/ επάρκειας που επιθυμεί.</a:t>
-            </a:r>
-          </a:p>
-          <a:p>
-            <a:pPr marL="550863" indent="-285750">
-              <a:spcBef>
-                <a:spcPts val="400"/>
-              </a:spcBef>
-            </a:pPr>
-            <a:r>
-              <a:rPr lang="el-GR" sz="2400" dirty="0"/>
-              <a:t>Φάσεις που θα γίνουν σε πραγματικό χρόνο:</a:t>
-            </a:r>
-          </a:p>
-          <a:p>
-            <a:pPr marL="950913" lvl="1">
-              <a:spcBef>
-                <a:spcPts val="400"/>
-              </a:spcBef>
-            </a:pPr>
-            <a:r>
-              <a:rPr lang="el-GR" sz="2000" dirty="0"/>
-              <a:t>Εισαγωγή</a:t>
-            </a:r>
-          </a:p>
-          <a:p>
-            <a:pPr marL="950913" lvl="1">
-              <a:spcBef>
-                <a:spcPts val="400"/>
-              </a:spcBef>
-            </a:pPr>
-            <a:r>
-              <a:rPr lang="el-GR" sz="2000" dirty="0"/>
-              <a:t>Παρουσίαση</a:t>
-            </a:r>
-          </a:p>
-          <a:p>
-            <a:pPr marL="950913" lvl="1">
-              <a:spcBef>
-                <a:spcPts val="400"/>
-              </a:spcBef>
-            </a:pPr>
-            <a:r>
-              <a:rPr lang="el-GR" sz="2000" dirty="0"/>
-              <a:t>Σύνοψη</a:t>
-            </a:r>
-          </a:p>
-          <a:p>
-            <a:pPr marL="550863">
-              <a:spcBef>
-                <a:spcPts val="400"/>
-              </a:spcBef>
-            </a:pPr>
-            <a:r>
-              <a:rPr lang="el-GR" sz="2400" dirty="0"/>
-              <a:t>Φάσεις που θα θεωρηθούν ως γενόμενες:</a:t>
-            </a:r>
-          </a:p>
-          <a:p>
-            <a:pPr marL="950913" lvl="1">
-              <a:spcBef>
-                <a:spcPts val="400"/>
-              </a:spcBef>
-            </a:pPr>
-            <a:r>
-              <a:rPr lang="el-GR" sz="2000" dirty="0"/>
-              <a:t>Εμπέδωση</a:t>
-            </a:r>
-          </a:p>
-          <a:p>
-            <a:pPr marL="950913" lvl="1">
-              <a:spcBef>
-                <a:spcPts val="400"/>
-              </a:spcBef>
-            </a:pPr>
-            <a:r>
-              <a:rPr lang="el-GR" sz="2000" dirty="0"/>
-              <a:t>Αξιολόγηση</a:t>
-            </a:r>
-          </a:p>
-          <a:p>
-            <a:pPr marL="550863">
-              <a:spcBef>
-                <a:spcPts val="400"/>
-              </a:spcBef>
-            </a:pPr>
-            <a:r>
-              <a:rPr lang="el-GR" sz="2400" dirty="0"/>
-              <a:t>ΟΛΕΣ οι φάσεις θα πρέπει να συνοδεύονται από το υλικό τους.</a:t>
-            </a:r>
-          </a:p>
-        </p:txBody>
-      </p:sp>
-    </p:spTree>
-    <p:extLst>
-      <p:ext uri="{BB962C8B-B14F-4D97-AF65-F5344CB8AC3E}">
-        <p14:creationId xmlns:p14="http://schemas.microsoft.com/office/powerpoint/2010/main" val="3361842378"/>
-      </p:ext>
-    </p:extLst>
-  </p:cSld>
-  <p:clrMapOvr>
-    <a:overrideClrMapping bg1="lt1" tx1="dk1" bg2="lt2" tx2="dk2" accent1="accent1" accent2="accent2" accent3="accent3" accent4="accent4" accent5="accent5" accent6="accent6" hlink="hlink" folHlink="folHlink"/>
-  </p:clrMapOvr>
-</p:sld>
-</file>
-
-<file path=ppt/slides/slide11.xml><?xml version="1.0" encoding="utf-8"?>
-<p:sld xmlns:a="http://schemas.openxmlformats.org/drawingml/2006/main" xmlns:r="http://schemas.openxmlformats.org/officeDocument/2006/relationships" xmlns:p="http://schemas.openxmlformats.org/presentationml/2006/main">
-  <p:cSld>
-    <p:bg>
-      <p:bgRef idx="1001">
-        <a:schemeClr val="bg1"/>
-      </p:bgRef>
-    </p:bg>
-    <p:spTree>
-      <p:nvGrpSpPr>
-        <p:cNvPr id="1" name="">
-          <a:extLst>
-            <a:ext uri="{FF2B5EF4-FFF2-40B4-BE49-F238E27FC236}">
-              <a16:creationId xmlns:a16="http://schemas.microsoft.com/office/drawing/2014/main" id="{F2A58C2A-8CCA-8871-706F-31A9A40F1C59}"/>
-            </a:ext>
-          </a:extLst>
-        </p:cNvPr>
-        <p:cNvGrpSpPr/>
-        <p:nvPr/>
-      </p:nvGrpSpPr>
-      <p:grpSpPr>
-        <a:xfrm>
-          <a:off x="0" y="0"/>
-          <a:ext cx="0" cy="0"/>
-          <a:chOff x="0" y="0"/>
-          <a:chExt cx="0" cy="0"/>
-        </a:xfrm>
-      </p:grpSpPr>
-      <p:sp>
-        <p:nvSpPr>
-          <p:cNvPr id="4" name="Title 1">
-            <a:extLst>
-              <a:ext uri="{FF2B5EF4-FFF2-40B4-BE49-F238E27FC236}">
-                <a16:creationId xmlns:a16="http://schemas.microsoft.com/office/drawing/2014/main" id="{CD45A906-168D-FFBB-52ED-0F0C33A48EFD}"/>
-              </a:ext>
-            </a:extLst>
-          </p:cNvPr>
-          <p:cNvSpPr>
-            <a:spLocks noGrp="1"/>
-          </p:cNvSpPr>
-          <p:nvPr>
-            <p:ph type="title"/>
-          </p:nvPr>
-        </p:nvSpPr>
-        <p:spPr>
-          <a:solidFill>
-            <a:srgbClr val="FAC090"/>
-          </a:solidFill>
-        </p:spPr>
-        <p:txBody>
-          <a:bodyPr>
-            <a:noAutofit/>
-          </a:bodyPr>
-          <a:lstStyle/>
-          <a:p>
-            <a:r>
-              <a:rPr lang="el-GR" sz="3600" dirty="0"/>
-              <a:t>Εργασία</a:t>
-            </a:r>
-            <a:endParaRPr lang="el-GR" sz="3600" b="1" dirty="0"/>
-          </a:p>
-        </p:txBody>
-      </p:sp>
-      <p:pic>
-        <p:nvPicPr>
-          <p:cNvPr id="5" name="Picture 2" descr="http://ucy.ac.cy/proypiresiaki/images/template_img/logo_el.png">
-            <a:extLst>
-              <a:ext uri="{FF2B5EF4-FFF2-40B4-BE49-F238E27FC236}">
-                <a16:creationId xmlns:a16="http://schemas.microsoft.com/office/drawing/2014/main" id="{A4E076AD-88B2-D1AB-9393-77B9C1A4A053}"/>
-              </a:ext>
-            </a:extLst>
-          </p:cNvPr>
-          <p:cNvPicPr>
-            <a:picLocks noChangeAspect="1" noChangeArrowheads="1"/>
-          </p:cNvPicPr>
-          <p:nvPr/>
-        </p:nvPicPr>
-        <p:blipFill>
-          <a:blip r:embed="rId4"/>
-          <a:srcRect/>
-          <a:stretch>
-            <a:fillRect/>
-          </a:stretch>
-        </p:blipFill>
-        <p:spPr bwMode="auto">
-          <a:xfrm>
-            <a:off x="7086600" y="6172200"/>
-            <a:ext cx="1920240" cy="533400"/>
-          </a:xfrm>
-          <a:prstGeom prst="rect">
-            <a:avLst/>
-          </a:prstGeom>
-          <a:noFill/>
-        </p:spPr>
-      </p:pic>
-      <p:sp>
-        <p:nvSpPr>
-          <p:cNvPr id="7" name="Content Placeholder 6">
-            <a:extLst>
-              <a:ext uri="{FF2B5EF4-FFF2-40B4-BE49-F238E27FC236}">
-                <a16:creationId xmlns:a16="http://schemas.microsoft.com/office/drawing/2014/main" id="{4E6E5F6C-7C16-9751-7B3A-685D264108D0}"/>
-              </a:ext>
-            </a:extLst>
-          </p:cNvPr>
-          <p:cNvSpPr>
-            <a:spLocks noGrp="1"/>
-          </p:cNvSpPr>
-          <p:nvPr>
-            <p:ph idx="1"/>
-          </p:nvPr>
-        </p:nvSpPr>
-        <p:spPr>
-          <a:xfrm>
-            <a:off x="457200" y="1600200"/>
-            <a:ext cx="8229600" cy="4267200"/>
-          </a:xfrm>
-        </p:spPr>
-        <p:txBody>
-          <a:bodyPr>
-            <a:noAutofit/>
-          </a:bodyPr>
-          <a:lstStyle/>
-          <a:p>
-            <a:pPr marL="550863" indent="-285750">
-              <a:spcBef>
-                <a:spcPts val="400"/>
-              </a:spcBef>
-            </a:pPr>
-            <a:r>
-              <a:rPr lang="el-GR" sz="2400" dirty="0"/>
-              <a:t>Το υλικό πρέπει να είναι πρωτότυπο (όχι ΦΕ από το βιβλίο).</a:t>
-            </a:r>
-          </a:p>
-          <a:p>
-            <a:pPr marL="550863" indent="-285750">
-              <a:spcBef>
-                <a:spcPts val="400"/>
-              </a:spcBef>
-            </a:pPr>
-            <a:r>
-              <a:rPr lang="el-GR" sz="2400" dirty="0"/>
-              <a:t>Όλοι οι συμμετέχοντες θα πρέπει να έχουν ενεργή συμμετοχή.</a:t>
-            </a:r>
-          </a:p>
-          <a:p>
-            <a:pPr marL="550863" indent="-285750">
-              <a:spcBef>
-                <a:spcPts val="400"/>
-              </a:spcBef>
-            </a:pPr>
-            <a:r>
-              <a:rPr lang="el-GR" sz="2400" dirty="0"/>
-              <a:t>Η σειρά παρουσίασης θα γίνει με κλήρωση. </a:t>
-            </a:r>
-          </a:p>
-          <a:p>
-            <a:pPr marL="550863" indent="-285750">
-              <a:spcBef>
-                <a:spcPts val="400"/>
-              </a:spcBef>
-            </a:pPr>
-            <a:r>
-              <a:rPr lang="el-GR" sz="2400" dirty="0"/>
-              <a:t>Δεν μπορείτε να αλλάξετε τα παραδοτέα σας πριν την παρουσίαση.</a:t>
-            </a:r>
-          </a:p>
-          <a:p>
-            <a:pPr marL="265113" indent="0">
-              <a:spcBef>
-                <a:spcPts val="400"/>
-              </a:spcBef>
-              <a:buNone/>
-            </a:pPr>
-            <a:endParaRPr lang="el-GR" sz="2400" dirty="0"/>
-          </a:p>
-        </p:txBody>
-      </p:sp>
-    </p:spTree>
-    <p:extLst>
-      <p:ext uri="{BB962C8B-B14F-4D97-AF65-F5344CB8AC3E}">
-        <p14:creationId xmlns:p14="http://schemas.microsoft.com/office/powerpoint/2010/main" val="190045608"/>
-      </p:ext>
-    </p:extLst>
-  </p:cSld>
-  <p:clrMapOvr>
-    <a:overrideClrMapping bg1="lt1" tx1="dk1" bg2="lt2" tx2="dk2" accent1="accent1" accent2="accent2" accent3="accent3" accent4="accent4" accent5="accent5" accent6="accent6" hlink="hlink" folHlink="folHlink"/>
-  </p:clrMapOvr>
-</p:sld>
-</file>
-
-<file path=ppt/slides/slide12.xml><?xml version="1.0" encoding="utf-8"?>
-<p:sld xmlns:a="http://schemas.openxmlformats.org/drawingml/2006/main" xmlns:r="http://schemas.openxmlformats.org/officeDocument/2006/relationships" xmlns:p="http://schemas.openxmlformats.org/presentationml/2006/main">
-  <p:cSld>
-    <p:bg>
-      <p:bgRef idx="1001">
-        <a:schemeClr val="bg1"/>
-      </p:bgRef>
-    </p:bg>
-    <p:spTree>
-      <p:nvGrpSpPr>
-        <p:cNvPr id="1" name="">
-          <a:extLst>
-            <a:ext uri="{FF2B5EF4-FFF2-40B4-BE49-F238E27FC236}">
               <a16:creationId xmlns:a16="http://schemas.microsoft.com/office/drawing/2014/main" id="{9DE1B69A-DE42-FD7E-8A6B-F5C920ECA438}"/>
             </a:ext>
           </a:extLst>
@@ -9309,7 +8665,7 @@
 </p:sld>
 </file>
 
-<file path=ppt/slides/slide13.xml><?xml version="1.0" encoding="utf-8"?>
+<file path=ppt/slides/slide11.xml><?xml version="1.0" encoding="utf-8"?>
 <p:sld xmlns:a="http://schemas.openxmlformats.org/drawingml/2006/main" xmlns:r="http://schemas.openxmlformats.org/officeDocument/2006/relationships" xmlns:p="http://schemas.openxmlformats.org/presentationml/2006/main">
   <p:cSld>
     <p:bg>
@@ -9592,7 +8948,7 @@
 </p:sld>
 </file>
 
-<file path=ppt/slides/slide14.xml><?xml version="1.0" encoding="utf-8"?>
+<file path=ppt/slides/slide12.xml><?xml version="1.0" encoding="utf-8"?>
 <p:sld xmlns:a="http://schemas.openxmlformats.org/drawingml/2006/main" xmlns:r="http://schemas.openxmlformats.org/officeDocument/2006/relationships" xmlns:p="http://schemas.openxmlformats.org/presentationml/2006/main">
   <p:cSld>
     <p:bg>
@@ -10911,611 +10267,6 @@
 <file path=ppt/slides/slide3.xml><?xml version="1.0" encoding="utf-8"?>
 <p:sld xmlns:a="http://schemas.openxmlformats.org/drawingml/2006/main" xmlns:r="http://schemas.openxmlformats.org/officeDocument/2006/relationships" xmlns:p="http://schemas.openxmlformats.org/presentationml/2006/main">
   <p:cSld>
-    <p:spTree>
-      <p:nvGrpSpPr>
-        <p:cNvPr id="1" name=""/>
-        <p:cNvGrpSpPr/>
-        <p:nvPr/>
-      </p:nvGrpSpPr>
-      <p:grpSpPr>
-        <a:xfrm>
-          <a:off x="0" y="0"/>
-          <a:ext cx="0" cy="0"/>
-          <a:chOff x="0" y="0"/>
-          <a:chExt cx="0" cy="0"/>
-        </a:xfrm>
-      </p:grpSpPr>
-      <p:grpSp>
-        <p:nvGrpSpPr>
-          <p:cNvPr id="10" name="Group 9"/>
-          <p:cNvGrpSpPr/>
-          <p:nvPr/>
-        </p:nvGrpSpPr>
-        <p:grpSpPr>
-          <a:xfrm>
-            <a:off x="0" y="0"/>
-            <a:ext cx="3086100" cy="6858000"/>
-            <a:chOff x="0" y="0"/>
-            <a:chExt cx="3086100" cy="6858000"/>
-          </a:xfrm>
-        </p:grpSpPr>
-        <p:sp>
-          <p:nvSpPr>
-            <p:cNvPr id="5" name="Rectangle 4"/>
-            <p:cNvSpPr/>
-            <p:nvPr/>
-          </p:nvSpPr>
-          <p:spPr>
-            <a:xfrm>
-              <a:off x="0" y="0"/>
-              <a:ext cx="3086100" cy="6858000"/>
-            </a:xfrm>
-            <a:prstGeom prst="rect">
-              <a:avLst/>
-            </a:prstGeom>
-            <a:solidFill>
-              <a:schemeClr val="accent6">
-                <a:lumMod val="40000"/>
-                <a:lumOff val="60000"/>
-              </a:schemeClr>
-            </a:solidFill>
-            <a:ln>
-              <a:noFill/>
-            </a:ln>
-          </p:spPr>
-          <p:style>
-            <a:lnRef idx="2">
-              <a:schemeClr val="accent1">
-                <a:shade val="50000"/>
-              </a:schemeClr>
-            </a:lnRef>
-            <a:fillRef idx="1">
-              <a:schemeClr val="accent1"/>
-            </a:fillRef>
-            <a:effectRef idx="0">
-              <a:schemeClr val="accent1"/>
-            </a:effectRef>
-            <a:fontRef idx="minor">
-              <a:schemeClr val="lt1"/>
-            </a:fontRef>
-          </p:style>
-          <p:txBody>
-            <a:bodyPr rtlCol="0" anchor="ctr"/>
-            <a:lstStyle/>
-            <a:p>
-              <a:pPr algn="ctr"/>
-              <a:endParaRPr lang="en-GB"/>
-            </a:p>
-          </p:txBody>
-        </p:sp>
-        <p:sp>
-          <p:nvSpPr>
-            <p:cNvPr id="7" name="TextBox 6"/>
-            <p:cNvSpPr txBox="1"/>
-            <p:nvPr/>
-          </p:nvSpPr>
-          <p:spPr>
-            <a:xfrm flipH="1">
-              <a:off x="83820" y="1447800"/>
-              <a:ext cx="2971799" cy="4862870"/>
-            </a:xfrm>
-            <a:prstGeom prst="rect">
-              <a:avLst/>
-            </a:prstGeom>
-            <a:noFill/>
-          </p:spPr>
-          <p:txBody>
-            <a:bodyPr wrap="square" rtlCol="0">
-              <a:spAutoFit/>
-            </a:bodyPr>
-            <a:lstStyle/>
-            <a:p>
-              <a:r>
-                <a:rPr lang="el-GR" sz="5400" dirty="0"/>
-                <a:t>01 </a:t>
-              </a:r>
-            </a:p>
-            <a:p>
-              <a:pPr lvl="0"/>
-              <a:r>
-                <a:rPr lang="el-GR" sz="2800" dirty="0"/>
-                <a:t>Δημιουργία Σχέδιου Μαθήματος (Μέσα διδασκαλίας, Οργάνωση τάξης, Πορεία Διδασκαλίας)</a:t>
-              </a:r>
-              <a:endParaRPr lang="en-GB" sz="2800" dirty="0"/>
-            </a:p>
-            <a:p>
-              <a:endParaRPr lang="en-GB" sz="3200" dirty="0"/>
-            </a:p>
-          </p:txBody>
-        </p:sp>
-      </p:grpSp>
-      <p:grpSp>
-        <p:nvGrpSpPr>
-          <p:cNvPr id="12" name="Group 11"/>
-          <p:cNvGrpSpPr/>
-          <p:nvPr/>
-        </p:nvGrpSpPr>
-        <p:grpSpPr>
-          <a:xfrm>
-            <a:off x="6115050" y="0"/>
-            <a:ext cx="3086100" cy="6858000"/>
-            <a:chOff x="6172200" y="0"/>
-            <a:chExt cx="3086100" cy="6858000"/>
-          </a:xfrm>
-        </p:grpSpPr>
-        <p:sp>
-          <p:nvSpPr>
-            <p:cNvPr id="6" name="Rectangle 5"/>
-            <p:cNvSpPr/>
-            <p:nvPr/>
-          </p:nvSpPr>
-          <p:spPr>
-            <a:xfrm>
-              <a:off x="6172200" y="0"/>
-              <a:ext cx="2971800" cy="6858000"/>
-            </a:xfrm>
-            <a:prstGeom prst="rect">
-              <a:avLst/>
-            </a:prstGeom>
-            <a:solidFill>
-              <a:schemeClr val="accent6">
-                <a:lumMod val="75000"/>
-              </a:schemeClr>
-            </a:solidFill>
-            <a:ln>
-              <a:noFill/>
-            </a:ln>
-          </p:spPr>
-          <p:style>
-            <a:lnRef idx="2">
-              <a:schemeClr val="accent1">
-                <a:shade val="50000"/>
-              </a:schemeClr>
-            </a:lnRef>
-            <a:fillRef idx="1">
-              <a:schemeClr val="accent1"/>
-            </a:fillRef>
-            <a:effectRef idx="0">
-              <a:schemeClr val="accent1"/>
-            </a:effectRef>
-            <a:fontRef idx="minor">
-              <a:schemeClr val="lt1"/>
-            </a:fontRef>
-          </p:style>
-          <p:txBody>
-            <a:bodyPr rtlCol="0" anchor="ctr"/>
-            <a:lstStyle/>
-            <a:p>
-              <a:pPr algn="ctr"/>
-              <a:endParaRPr lang="en-GB"/>
-            </a:p>
-          </p:txBody>
-        </p:sp>
-        <p:sp>
-          <p:nvSpPr>
-            <p:cNvPr id="8" name="TextBox 7"/>
-            <p:cNvSpPr txBox="1"/>
-            <p:nvPr/>
-          </p:nvSpPr>
-          <p:spPr>
-            <a:xfrm flipH="1">
-              <a:off x="6286501" y="1463039"/>
-              <a:ext cx="2971799" cy="1354217"/>
-            </a:xfrm>
-            <a:prstGeom prst="rect">
-              <a:avLst/>
-            </a:prstGeom>
-            <a:noFill/>
-          </p:spPr>
-          <p:txBody>
-            <a:bodyPr wrap="square" rtlCol="0">
-              <a:spAutoFit/>
-            </a:bodyPr>
-            <a:lstStyle/>
-            <a:p>
-              <a:r>
-                <a:rPr lang="el-GR" sz="5400" dirty="0"/>
-                <a:t>03 </a:t>
-              </a:r>
-            </a:p>
-            <a:p>
-              <a:pPr lvl="0"/>
-              <a:r>
-                <a:rPr lang="el-GR" sz="2800" dirty="0"/>
-                <a:t>Χρήσιμα Εργαλεία</a:t>
-              </a:r>
-              <a:endParaRPr lang="en-GB" sz="2800" dirty="0"/>
-            </a:p>
-          </p:txBody>
-        </p:sp>
-      </p:grpSp>
-      <p:grpSp>
-        <p:nvGrpSpPr>
-          <p:cNvPr id="11" name="Group 10"/>
-          <p:cNvGrpSpPr/>
-          <p:nvPr/>
-        </p:nvGrpSpPr>
-        <p:grpSpPr>
-          <a:xfrm>
-            <a:off x="3028950" y="0"/>
-            <a:ext cx="3086100" cy="6858000"/>
-            <a:chOff x="3086100" y="0"/>
-            <a:chExt cx="3086100" cy="6858000"/>
-          </a:xfrm>
-        </p:grpSpPr>
-        <p:sp>
-          <p:nvSpPr>
-            <p:cNvPr id="4" name="Rectangle 3"/>
-            <p:cNvSpPr/>
-            <p:nvPr/>
-          </p:nvSpPr>
-          <p:spPr>
-            <a:xfrm>
-              <a:off x="3086100" y="0"/>
-              <a:ext cx="3086100" cy="6858000"/>
-            </a:xfrm>
-            <a:prstGeom prst="rect">
-              <a:avLst/>
-            </a:prstGeom>
-            <a:solidFill>
-              <a:srgbClr val="FAC090"/>
-            </a:solidFill>
-            <a:ln>
-              <a:noFill/>
-            </a:ln>
-          </p:spPr>
-          <p:style>
-            <a:lnRef idx="2">
-              <a:schemeClr val="accent1">
-                <a:shade val="50000"/>
-              </a:schemeClr>
-            </a:lnRef>
-            <a:fillRef idx="1">
-              <a:schemeClr val="accent1"/>
-            </a:fillRef>
-            <a:effectRef idx="0">
-              <a:schemeClr val="accent1"/>
-            </a:effectRef>
-            <a:fontRef idx="minor">
-              <a:schemeClr val="lt1"/>
-            </a:fontRef>
-          </p:style>
-          <p:txBody>
-            <a:bodyPr rtlCol="0" anchor="ctr"/>
-            <a:lstStyle/>
-            <a:p>
-              <a:pPr algn="ctr"/>
-              <a:endParaRPr lang="en-GB"/>
-            </a:p>
-          </p:txBody>
-        </p:sp>
-        <p:sp>
-          <p:nvSpPr>
-            <p:cNvPr id="9" name="TextBox 8"/>
-            <p:cNvSpPr txBox="1"/>
-            <p:nvPr/>
-          </p:nvSpPr>
-          <p:spPr>
-            <a:xfrm flipH="1">
-              <a:off x="3116581" y="1463039"/>
-              <a:ext cx="2971799" cy="1354217"/>
-            </a:xfrm>
-            <a:prstGeom prst="rect">
-              <a:avLst/>
-            </a:prstGeom>
-            <a:noFill/>
-          </p:spPr>
-          <p:txBody>
-            <a:bodyPr wrap="square" rtlCol="0">
-              <a:spAutoFit/>
-            </a:bodyPr>
-            <a:lstStyle/>
-            <a:p>
-              <a:r>
-                <a:rPr lang="el-GR" sz="5400" dirty="0"/>
-                <a:t>02 </a:t>
-              </a:r>
-            </a:p>
-            <a:p>
-              <a:r>
-                <a:rPr lang="el-GR" sz="2800" dirty="0" err="1"/>
-                <a:t>Μικροδιδασκαλία</a:t>
-              </a:r>
-              <a:r>
-                <a:rPr lang="en-US" sz="2800" dirty="0"/>
-                <a:t> </a:t>
-              </a:r>
-              <a:endParaRPr lang="en-GB" sz="3200" dirty="0"/>
-            </a:p>
-          </p:txBody>
-        </p:sp>
-      </p:grpSp>
-    </p:spTree>
-    <p:extLst>
-      <p:ext uri="{BB962C8B-B14F-4D97-AF65-F5344CB8AC3E}">
-        <p14:creationId xmlns:p14="http://schemas.microsoft.com/office/powerpoint/2010/main" val="3542971618"/>
-      </p:ext>
-    </p:extLst>
-  </p:cSld>
-  <p:clrMapOvr>
-    <a:masterClrMapping/>
-  </p:clrMapOvr>
-  <p:timing>
-    <p:tnLst>
-      <p:par>
-        <p:cTn id="1" dur="indefinite" restart="never" nodeType="tmRoot">
-          <p:childTnLst>
-            <p:seq concurrent="1" nextAc="seek">
-              <p:cTn id="2" dur="indefinite" nodeType="mainSeq">
-                <p:childTnLst>
-                  <p:par>
-                    <p:cTn id="3" fill="hold">
-                      <p:stCondLst>
-                        <p:cond delay="indefinite"/>
-                        <p:cond evt="onBegin" delay="0">
-                          <p:tn val="2"/>
-                        </p:cond>
-                      </p:stCondLst>
-                      <p:childTnLst>
-                        <p:par>
-                          <p:cTn id="4" fill="hold">
-                            <p:stCondLst>
-                              <p:cond delay="0"/>
-                            </p:stCondLst>
-                            <p:childTnLst>
-                              <p:par>
-                                <p:cTn id="5" presetID="2" presetClass="entr" presetSubtype="8" fill="hold" nodeType="withEffect">
-                                  <p:stCondLst>
-                                    <p:cond delay="0"/>
-                                  </p:stCondLst>
-                                  <p:childTnLst>
-                                    <p:set>
-                                      <p:cBhvr>
-                                        <p:cTn id="6" dur="1" fill="hold">
-                                          <p:stCondLst>
-                                            <p:cond delay="0"/>
-                                          </p:stCondLst>
-                                        </p:cTn>
-                                        <p:tgtEl>
-                                          <p:spTgt spid="10"/>
-                                        </p:tgtEl>
-                                        <p:attrNameLst>
-                                          <p:attrName>style.visibility</p:attrName>
-                                        </p:attrNameLst>
-                                      </p:cBhvr>
-                                      <p:to>
-                                        <p:strVal val="visible"/>
-                                      </p:to>
-                                    </p:set>
-                                    <p:anim calcmode="lin" valueType="num">
-                                      <p:cBhvr additive="base">
-                                        <p:cTn id="7" dur="2000" fill="hold"/>
-                                        <p:tgtEl>
-                                          <p:spTgt spid="10"/>
-                                        </p:tgtEl>
-                                        <p:attrNameLst>
-                                          <p:attrName>ppt_x</p:attrName>
-                                        </p:attrNameLst>
-                                      </p:cBhvr>
-                                      <p:tavLst>
-                                        <p:tav tm="0">
-                                          <p:val>
-                                            <p:strVal val="0-#ppt_w/2"/>
-                                          </p:val>
-                                        </p:tav>
-                                        <p:tav tm="100000">
-                                          <p:val>
-                                            <p:strVal val="#ppt_x"/>
-                                          </p:val>
-                                        </p:tav>
-                                      </p:tavLst>
-                                    </p:anim>
-                                    <p:anim calcmode="lin" valueType="num">
-                                      <p:cBhvr additive="base">
-                                        <p:cTn id="8" dur="2000" fill="hold"/>
-                                        <p:tgtEl>
-                                          <p:spTgt spid="10"/>
-                                        </p:tgtEl>
-                                        <p:attrNameLst>
-                                          <p:attrName>ppt_y</p:attrName>
-                                        </p:attrNameLst>
-                                      </p:cBhvr>
-                                      <p:tavLst>
-                                        <p:tav tm="0">
-                                          <p:val>
-                                            <p:strVal val="#ppt_y"/>
-                                          </p:val>
-                                        </p:tav>
-                                        <p:tav tm="100000">
-                                          <p:val>
-                                            <p:strVal val="#ppt_y"/>
-                                          </p:val>
-                                        </p:tav>
-                                      </p:tavLst>
-                                    </p:anim>
-                                  </p:childTnLst>
-                                </p:cTn>
-                              </p:par>
-                              <p:par>
-                                <p:cTn id="9" presetID="2" presetClass="entr" presetSubtype="8" fill="hold" nodeType="withEffect">
-                                  <p:stCondLst>
-                                    <p:cond delay="0"/>
-                                  </p:stCondLst>
-                                  <p:childTnLst>
-                                    <p:set>
-                                      <p:cBhvr>
-                                        <p:cTn id="10" dur="1" fill="hold">
-                                          <p:stCondLst>
-                                            <p:cond delay="0"/>
-                                          </p:stCondLst>
-                                        </p:cTn>
-                                        <p:tgtEl>
-                                          <p:spTgt spid="11"/>
-                                        </p:tgtEl>
-                                        <p:attrNameLst>
-                                          <p:attrName>style.visibility</p:attrName>
-                                        </p:attrNameLst>
-                                      </p:cBhvr>
-                                      <p:to>
-                                        <p:strVal val="visible"/>
-                                      </p:to>
-                                    </p:set>
-                                    <p:anim calcmode="lin" valueType="num">
-                                      <p:cBhvr additive="base">
-                                        <p:cTn id="11" dur="2000" fill="hold"/>
-                                        <p:tgtEl>
-                                          <p:spTgt spid="11"/>
-                                        </p:tgtEl>
-                                        <p:attrNameLst>
-                                          <p:attrName>ppt_x</p:attrName>
-                                        </p:attrNameLst>
-                                      </p:cBhvr>
-                                      <p:tavLst>
-                                        <p:tav tm="0">
-                                          <p:val>
-                                            <p:strVal val="0-#ppt_w/2"/>
-                                          </p:val>
-                                        </p:tav>
-                                        <p:tav tm="100000">
-                                          <p:val>
-                                            <p:strVal val="#ppt_x"/>
-                                          </p:val>
-                                        </p:tav>
-                                      </p:tavLst>
-                                    </p:anim>
-                                    <p:anim calcmode="lin" valueType="num">
-                                      <p:cBhvr additive="base">
-                                        <p:cTn id="12" dur="2000" fill="hold"/>
-                                        <p:tgtEl>
-                                          <p:spTgt spid="11"/>
-                                        </p:tgtEl>
-                                        <p:attrNameLst>
-                                          <p:attrName>ppt_y</p:attrName>
-                                        </p:attrNameLst>
-                                      </p:cBhvr>
-                                      <p:tavLst>
-                                        <p:tav tm="0">
-                                          <p:val>
-                                            <p:strVal val="#ppt_y"/>
-                                          </p:val>
-                                        </p:tav>
-                                        <p:tav tm="100000">
-                                          <p:val>
-                                            <p:strVal val="#ppt_y"/>
-                                          </p:val>
-                                        </p:tav>
-                                      </p:tavLst>
-                                    </p:anim>
-                                  </p:childTnLst>
-                                </p:cTn>
-                              </p:par>
-                              <p:par>
-                                <p:cTn id="13" presetID="2" presetClass="entr" presetSubtype="8" fill="hold" nodeType="withEffect">
-                                  <p:stCondLst>
-                                    <p:cond delay="0"/>
-                                  </p:stCondLst>
-                                  <p:childTnLst>
-                                    <p:set>
-                                      <p:cBhvr>
-                                        <p:cTn id="14" dur="1" fill="hold">
-                                          <p:stCondLst>
-                                            <p:cond delay="0"/>
-                                          </p:stCondLst>
-                                        </p:cTn>
-                                        <p:tgtEl>
-                                          <p:spTgt spid="12"/>
-                                        </p:tgtEl>
-                                        <p:attrNameLst>
-                                          <p:attrName>style.visibility</p:attrName>
-                                        </p:attrNameLst>
-                                      </p:cBhvr>
-                                      <p:to>
-                                        <p:strVal val="visible"/>
-                                      </p:to>
-                                    </p:set>
-                                    <p:anim calcmode="lin" valueType="num">
-                                      <p:cBhvr additive="base">
-                                        <p:cTn id="15" dur="2000" fill="hold"/>
-                                        <p:tgtEl>
-                                          <p:spTgt spid="12"/>
-                                        </p:tgtEl>
-                                        <p:attrNameLst>
-                                          <p:attrName>ppt_x</p:attrName>
-                                        </p:attrNameLst>
-                                      </p:cBhvr>
-                                      <p:tavLst>
-                                        <p:tav tm="0">
-                                          <p:val>
-                                            <p:strVal val="0-#ppt_w/2"/>
-                                          </p:val>
-                                        </p:tav>
-                                        <p:tav tm="100000">
-                                          <p:val>
-                                            <p:strVal val="#ppt_x"/>
-                                          </p:val>
-                                        </p:tav>
-                                      </p:tavLst>
-                                    </p:anim>
-                                    <p:anim calcmode="lin" valueType="num">
-                                      <p:cBhvr additive="base">
-                                        <p:cTn id="16" dur="2000" fill="hold"/>
-                                        <p:tgtEl>
-                                          <p:spTgt spid="12"/>
-                                        </p:tgtEl>
-                                        <p:attrNameLst>
-                                          <p:attrName>ppt_y</p:attrName>
-                                        </p:attrNameLst>
-                                      </p:cBhvr>
-                                      <p:tavLst>
-                                        <p:tav tm="0">
-                                          <p:val>
-                                            <p:strVal val="#ppt_y"/>
-                                          </p:val>
-                                        </p:tav>
-                                        <p:tav tm="100000">
-                                          <p:val>
-                                            <p:strVal val="#ppt_y"/>
-                                          </p:val>
-                                        </p:tav>
-                                      </p:tavLst>
-                                    </p:anim>
-                                  </p:childTnLst>
-                                </p:cTn>
-                              </p:par>
-                            </p:childTnLst>
-                          </p:cTn>
-                        </p:par>
-                      </p:childTnLst>
-                    </p:cTn>
-                  </p:par>
-                </p:childTnLst>
-              </p:cTn>
-              <p:prevCondLst>
-                <p:cond evt="onPrev" delay="0">
-                  <p:tgtEl>
-                    <p:sldTgt/>
-                  </p:tgtEl>
-                </p:cond>
-              </p:prevCondLst>
-              <p:nextCondLst>
-                <p:cond evt="onNext" delay="0">
-                  <p:tgtEl>
-                    <p:sldTgt/>
-                  </p:tgtEl>
-                </p:cond>
-              </p:nextCondLst>
-            </p:seq>
-          </p:childTnLst>
-        </p:cTn>
-      </p:par>
-    </p:tnLst>
-  </p:timing>
-</p:sld>
-</file>
-
-<file path=ppt/slides/slide4.xml><?xml version="1.0" encoding="utf-8"?>
-<p:sld xmlns:a="http://schemas.openxmlformats.org/drawingml/2006/main" xmlns:r="http://schemas.openxmlformats.org/officeDocument/2006/relationships" xmlns:p="http://schemas.openxmlformats.org/presentationml/2006/main">
-  <p:cSld>
     <p:bg>
       <p:bgPr>
         <a:solidFill>
@@ -11621,7 +10372,7 @@
 </p:sld>
 </file>
 
-<file path=ppt/slides/slide5.xml><?xml version="1.0" encoding="utf-8"?>
+<file path=ppt/slides/slide4.xml><?xml version="1.0" encoding="utf-8"?>
 <p:sld xmlns:a="http://schemas.openxmlformats.org/drawingml/2006/main" xmlns:r="http://schemas.openxmlformats.org/officeDocument/2006/relationships" xmlns:p="http://schemas.openxmlformats.org/presentationml/2006/main">
   <p:cSld>
     <p:bg>
@@ -11793,7 +10544,7 @@
 </p:sld>
 </file>
 
-<file path=ppt/slides/slide6.xml><?xml version="1.0" encoding="utf-8"?>
+<file path=ppt/slides/slide5.xml><?xml version="1.0" encoding="utf-8"?>
 <p:sld xmlns:a="http://schemas.openxmlformats.org/drawingml/2006/main" xmlns:r="http://schemas.openxmlformats.org/officeDocument/2006/relationships" xmlns:p="http://schemas.openxmlformats.org/presentationml/2006/main">
   <p:cSld>
     <p:bg>
@@ -11969,7 +10720,7 @@
 </p:sld>
 </file>
 
-<file path=ppt/slides/slide7.xml><?xml version="1.0" encoding="utf-8"?>
+<file path=ppt/slides/slide6.xml><?xml version="1.0" encoding="utf-8"?>
 <p:sld xmlns:a="http://schemas.openxmlformats.org/drawingml/2006/main" xmlns:r="http://schemas.openxmlformats.org/officeDocument/2006/relationships" xmlns:p="http://schemas.openxmlformats.org/presentationml/2006/main">
   <p:cSld>
     <p:bg>
@@ -12085,7 +10836,7 @@
 </p:sld>
 </file>
 
-<file path=ppt/slides/slide8.xml><?xml version="1.0" encoding="utf-8"?>
+<file path=ppt/slides/slide7.xml><?xml version="1.0" encoding="utf-8"?>
 <p:sld xmlns:a="http://schemas.openxmlformats.org/drawingml/2006/main" xmlns:r="http://schemas.openxmlformats.org/officeDocument/2006/relationships" xmlns:p="http://schemas.openxmlformats.org/presentationml/2006/main">
   <p:cSld>
     <p:bg>
@@ -12278,7 +11029,7 @@
 </p:sld>
 </file>
 
-<file path=ppt/slides/slide9.xml><?xml version="1.0" encoding="utf-8"?>
+<file path=ppt/slides/slide8.xml><?xml version="1.0" encoding="utf-8"?>
 <p:sld xmlns:a="http://schemas.openxmlformats.org/drawingml/2006/main" xmlns:r="http://schemas.openxmlformats.org/officeDocument/2006/relationships" xmlns:p="http://schemas.openxmlformats.org/presentationml/2006/main">
   <p:cSld>
     <p:bg>
@@ -12516,6 +11267,196 @@
     <p:extLst>
       <p:ext uri="{BB962C8B-B14F-4D97-AF65-F5344CB8AC3E}">
         <p14:creationId xmlns:p14="http://schemas.microsoft.com/office/powerpoint/2010/main" val="2632511756"/>
+      </p:ext>
+    </p:extLst>
+  </p:cSld>
+  <p:clrMapOvr>
+    <a:overrideClrMapping bg1="lt1" tx1="dk1" bg2="lt2" tx2="dk2" accent1="accent1" accent2="accent2" accent3="accent3" accent4="accent4" accent5="accent5" accent6="accent6" hlink="hlink" folHlink="folHlink"/>
+  </p:clrMapOvr>
+</p:sld>
+</file>
+
+<file path=ppt/slides/slide9.xml><?xml version="1.0" encoding="utf-8"?>
+<p:sld xmlns:a="http://schemas.openxmlformats.org/drawingml/2006/main" xmlns:r="http://schemas.openxmlformats.org/officeDocument/2006/relationships" xmlns:p="http://schemas.openxmlformats.org/presentationml/2006/main">
+  <p:cSld>
+    <p:bg>
+      <p:bgRef idx="1001">
+        <a:schemeClr val="bg1"/>
+      </p:bgRef>
+    </p:bg>
+    <p:spTree>
+      <p:nvGrpSpPr>
+        <p:cNvPr id="1" name="">
+          <a:extLst>
+            <a:ext uri="{FF2B5EF4-FFF2-40B4-BE49-F238E27FC236}">
+              <a16:creationId xmlns:a16="http://schemas.microsoft.com/office/drawing/2014/main" id="{F2A58C2A-8CCA-8871-706F-31A9A40F1C59}"/>
+            </a:ext>
+          </a:extLst>
+        </p:cNvPr>
+        <p:cNvGrpSpPr/>
+        <p:nvPr/>
+      </p:nvGrpSpPr>
+      <p:grpSpPr>
+        <a:xfrm>
+          <a:off x="0" y="0"/>
+          <a:ext cx="0" cy="0"/>
+          <a:chOff x="0" y="0"/>
+          <a:chExt cx="0" cy="0"/>
+        </a:xfrm>
+      </p:grpSpPr>
+      <p:sp>
+        <p:nvSpPr>
+          <p:cNvPr id="4" name="Title 1">
+            <a:extLst>
+              <a:ext uri="{FF2B5EF4-FFF2-40B4-BE49-F238E27FC236}">
+                <a16:creationId xmlns:a16="http://schemas.microsoft.com/office/drawing/2014/main" id="{CD45A906-168D-FFBB-52ED-0F0C33A48EFD}"/>
+              </a:ext>
+            </a:extLst>
+          </p:cNvPr>
+          <p:cNvSpPr>
+            <a:spLocks noGrp="1"/>
+          </p:cNvSpPr>
+          <p:nvPr>
+            <p:ph type="title"/>
+          </p:nvPr>
+        </p:nvSpPr>
+        <p:spPr>
+          <a:solidFill>
+            <a:srgbClr val="FAC090"/>
+          </a:solidFill>
+        </p:spPr>
+        <p:txBody>
+          <a:bodyPr>
+            <a:noAutofit/>
+          </a:bodyPr>
+          <a:lstStyle/>
+          <a:p>
+            <a:r>
+              <a:rPr lang="el-GR" sz="3600" dirty="0"/>
+              <a:t>Εργασία</a:t>
+            </a:r>
+            <a:endParaRPr lang="el-GR" sz="3600" b="1" dirty="0"/>
+          </a:p>
+        </p:txBody>
+      </p:sp>
+      <p:pic>
+        <p:nvPicPr>
+          <p:cNvPr id="5" name="Picture 2" descr="http://ucy.ac.cy/proypiresiaki/images/template_img/logo_el.png">
+            <a:extLst>
+              <a:ext uri="{FF2B5EF4-FFF2-40B4-BE49-F238E27FC236}">
+                <a16:creationId xmlns:a16="http://schemas.microsoft.com/office/drawing/2014/main" id="{A4E076AD-88B2-D1AB-9393-77B9C1A4A053}"/>
+              </a:ext>
+            </a:extLst>
+          </p:cNvPr>
+          <p:cNvPicPr>
+            <a:picLocks noChangeAspect="1" noChangeArrowheads="1"/>
+          </p:cNvPicPr>
+          <p:nvPr/>
+        </p:nvPicPr>
+        <p:blipFill>
+          <a:blip r:embed="rId4"/>
+          <a:srcRect/>
+          <a:stretch>
+            <a:fillRect/>
+          </a:stretch>
+        </p:blipFill>
+        <p:spPr bwMode="auto">
+          <a:xfrm>
+            <a:off x="7086600" y="6172200"/>
+            <a:ext cx="1920240" cy="533400"/>
+          </a:xfrm>
+          <a:prstGeom prst="rect">
+            <a:avLst/>
+          </a:prstGeom>
+          <a:noFill/>
+        </p:spPr>
+      </p:pic>
+      <p:sp>
+        <p:nvSpPr>
+          <p:cNvPr id="7" name="Content Placeholder 6">
+            <a:extLst>
+              <a:ext uri="{FF2B5EF4-FFF2-40B4-BE49-F238E27FC236}">
+                <a16:creationId xmlns:a16="http://schemas.microsoft.com/office/drawing/2014/main" id="{4E6E5F6C-7C16-9751-7B3A-685D264108D0}"/>
+              </a:ext>
+            </a:extLst>
+          </p:cNvPr>
+          <p:cNvSpPr>
+            <a:spLocks noGrp="1"/>
+          </p:cNvSpPr>
+          <p:nvPr>
+            <p:ph idx="1"/>
+          </p:nvPr>
+        </p:nvSpPr>
+        <p:spPr>
+          <a:xfrm>
+            <a:off x="457200" y="1600200"/>
+            <a:ext cx="8229600" cy="4267200"/>
+          </a:xfrm>
+        </p:spPr>
+        <p:txBody>
+          <a:bodyPr>
+            <a:noAutofit/>
+          </a:bodyPr>
+          <a:lstStyle/>
+          <a:p>
+            <a:pPr marL="550863" indent="-285750">
+              <a:spcBef>
+                <a:spcPts val="400"/>
+              </a:spcBef>
+            </a:pPr>
+            <a:r>
+              <a:rPr lang="el-GR" sz="2400" dirty="0"/>
+              <a:t>Το υλικό πρέπει να είναι πρωτότυπο (όχι ΦΕ από το βιβλίο).</a:t>
+            </a:r>
+          </a:p>
+          <a:p>
+            <a:pPr marL="550863" indent="-285750">
+              <a:spcBef>
+                <a:spcPts val="400"/>
+              </a:spcBef>
+            </a:pPr>
+            <a:r>
+              <a:rPr lang="el-GR" sz="2400" dirty="0"/>
+              <a:t>Όλοι οι συμμετέχοντες θα πρέπει να έχουν ενεργή συμμετοχή.</a:t>
+            </a:r>
+          </a:p>
+          <a:p>
+            <a:pPr marL="550863" indent="-285750">
+              <a:spcBef>
+                <a:spcPts val="400"/>
+              </a:spcBef>
+            </a:pPr>
+            <a:r>
+              <a:rPr lang="el-GR" sz="2400" dirty="0"/>
+              <a:t>Η σειρά παρουσίασης θα γίνει με κλήρωση. </a:t>
+            </a:r>
+          </a:p>
+          <a:p>
+            <a:pPr marL="550863" indent="-285750">
+              <a:spcBef>
+                <a:spcPts val="400"/>
+              </a:spcBef>
+            </a:pPr>
+            <a:r>
+              <a:rPr lang="el-GR" sz="2400" dirty="0"/>
+              <a:t>Δεν μπορείτε να αλλάξετε τα παραδοτέα σας πριν την παρουσίαση.</a:t>
+            </a:r>
+          </a:p>
+          <a:p>
+            <a:pPr marL="265113" indent="0">
+              <a:spcBef>
+                <a:spcPts val="400"/>
+              </a:spcBef>
+              <a:buNone/>
+            </a:pPr>
+            <a:endParaRPr lang="el-GR" sz="2400" dirty="0"/>
+          </a:p>
+        </p:txBody>
+      </p:sp>
+    </p:spTree>
+    <p:extLst>
+      <p:ext uri="{BB962C8B-B14F-4D97-AF65-F5344CB8AC3E}">
+        <p14:creationId xmlns:p14="http://schemas.microsoft.com/office/powerpoint/2010/main" val="190045608"/>
       </p:ext>
     </p:extLst>
   </p:cSld>
@@ -13112,49 +12053,6 @@
 </a:themeOverride>
 </file>
 
-<file path=ppt/theme/themeOverride10.xml><?xml version="1.0" encoding="utf-8"?>
-<a:themeOverride xmlns:a="http://schemas.openxmlformats.org/drawingml/2006/main">
-  <a:clrScheme name="Office">
-    <a:dk1>
-      <a:sysClr val="windowText" lastClr="000000"/>
-    </a:dk1>
-    <a:lt1>
-      <a:sysClr val="window" lastClr="FFFFFF"/>
-    </a:lt1>
-    <a:dk2>
-      <a:srgbClr val="1F497D"/>
-    </a:dk2>
-    <a:lt2>
-      <a:srgbClr val="EEECE1"/>
-    </a:lt2>
-    <a:accent1>
-      <a:srgbClr val="4F81BD"/>
-    </a:accent1>
-    <a:accent2>
-      <a:srgbClr val="C0504D"/>
-    </a:accent2>
-    <a:accent3>
-      <a:srgbClr val="9BBB59"/>
-    </a:accent3>
-    <a:accent4>
-      <a:srgbClr val="8064A2"/>
-    </a:accent4>
-    <a:accent5>
-      <a:srgbClr val="4BACC6"/>
-    </a:accent5>
-    <a:accent6>
-      <a:srgbClr val="F79646"/>
-    </a:accent6>
-    <a:hlink>
-      <a:srgbClr val="0000FF"/>
-    </a:hlink>
-    <a:folHlink>
-      <a:srgbClr val="800080"/>
-    </a:folHlink>
-  </a:clrScheme>
-</a:themeOverride>
-</file>
-
 <file path=ppt/theme/themeOverride2.xml><?xml version="1.0" encoding="utf-8"?>
 <a:themeOverride xmlns:a="http://schemas.openxmlformats.org/drawingml/2006/main">
   <a:clrScheme name="Office">
